--- a/clases/Cap02_Extraccion_de_Caracteristicas/presentations/PAT02_E04_Texturas.pptx
+++ b/clases/Cap02_Extraccion_de_Caracteristicas/presentations/PAT02_E04_Texturas.pptx
@@ -271,7 +271,7 @@
           <a:p>
             <a:fld id="{24C1AB6E-FDAA-194A-A92E-EE902A211754}" type="datetimeFigureOut">
               <a:rPr lang="en-CL" smtClean="0"/>
-              <a:t>12-04-26</a:t>
+              <a:t>14-04-26</a:t>
             </a:fld>
             <a:endParaRPr lang="en-CL"/>
           </a:p>
@@ -471,7 +471,7 @@
           <a:p>
             <a:fld id="{24C1AB6E-FDAA-194A-A92E-EE902A211754}" type="datetimeFigureOut">
               <a:rPr lang="en-CL" smtClean="0"/>
-              <a:t>12-04-26</a:t>
+              <a:t>14-04-26</a:t>
             </a:fld>
             <a:endParaRPr lang="en-CL"/>
           </a:p>
@@ -681,7 +681,7 @@
           <a:p>
             <a:fld id="{24C1AB6E-FDAA-194A-A92E-EE902A211754}" type="datetimeFigureOut">
               <a:rPr lang="en-CL" smtClean="0"/>
-              <a:t>12-04-26</a:t>
+              <a:t>14-04-26</a:t>
             </a:fld>
             <a:endParaRPr lang="en-CL"/>
           </a:p>
@@ -881,7 +881,7 @@
           <a:p>
             <a:fld id="{24C1AB6E-FDAA-194A-A92E-EE902A211754}" type="datetimeFigureOut">
               <a:rPr lang="en-CL" smtClean="0"/>
-              <a:t>12-04-26</a:t>
+              <a:t>14-04-26</a:t>
             </a:fld>
             <a:endParaRPr lang="en-CL"/>
           </a:p>
@@ -1157,7 +1157,7 @@
           <a:p>
             <a:fld id="{24C1AB6E-FDAA-194A-A92E-EE902A211754}" type="datetimeFigureOut">
               <a:rPr lang="en-CL" smtClean="0"/>
-              <a:t>12-04-26</a:t>
+              <a:t>14-04-26</a:t>
             </a:fld>
             <a:endParaRPr lang="en-CL"/>
           </a:p>
@@ -1425,7 +1425,7 @@
           <a:p>
             <a:fld id="{24C1AB6E-FDAA-194A-A92E-EE902A211754}" type="datetimeFigureOut">
               <a:rPr lang="en-CL" smtClean="0"/>
-              <a:t>12-04-26</a:t>
+              <a:t>14-04-26</a:t>
             </a:fld>
             <a:endParaRPr lang="en-CL"/>
           </a:p>
@@ -1840,7 +1840,7 @@
           <a:p>
             <a:fld id="{24C1AB6E-FDAA-194A-A92E-EE902A211754}" type="datetimeFigureOut">
               <a:rPr lang="en-CL" smtClean="0"/>
-              <a:t>12-04-26</a:t>
+              <a:t>14-04-26</a:t>
             </a:fld>
             <a:endParaRPr lang="en-CL"/>
           </a:p>
@@ -1982,7 +1982,7 @@
           <a:p>
             <a:fld id="{24C1AB6E-FDAA-194A-A92E-EE902A211754}" type="datetimeFigureOut">
               <a:rPr lang="en-CL" smtClean="0"/>
-              <a:t>12-04-26</a:t>
+              <a:t>14-04-26</a:t>
             </a:fld>
             <a:endParaRPr lang="en-CL"/>
           </a:p>
@@ -2095,7 +2095,7 @@
           <a:p>
             <a:fld id="{24C1AB6E-FDAA-194A-A92E-EE902A211754}" type="datetimeFigureOut">
               <a:rPr lang="en-CL" smtClean="0"/>
-              <a:t>12-04-26</a:t>
+              <a:t>14-04-26</a:t>
             </a:fld>
             <a:endParaRPr lang="en-CL"/>
           </a:p>
@@ -2408,7 +2408,7 @@
           <a:p>
             <a:fld id="{24C1AB6E-FDAA-194A-A92E-EE902A211754}" type="datetimeFigureOut">
               <a:rPr lang="en-CL" smtClean="0"/>
-              <a:t>12-04-26</a:t>
+              <a:t>14-04-26</a:t>
             </a:fld>
             <a:endParaRPr lang="en-CL"/>
           </a:p>
@@ -2697,7 +2697,7 @@
           <a:p>
             <a:fld id="{24C1AB6E-FDAA-194A-A92E-EE902A211754}" type="datetimeFigureOut">
               <a:rPr lang="en-CL" smtClean="0"/>
-              <a:t>12-04-26</a:t>
+              <a:t>14-04-26</a:t>
             </a:fld>
             <a:endParaRPr lang="en-CL"/>
           </a:p>
@@ -2940,7 +2940,7 @@
           <a:p>
             <a:fld id="{24C1AB6E-FDAA-194A-A92E-EE902A211754}" type="datetimeFigureOut">
               <a:rPr lang="en-CL" smtClean="0"/>
-              <a:t>12-04-26</a:t>
+              <a:t>14-04-26</a:t>
             </a:fld>
             <a:endParaRPr lang="en-CL"/>
           </a:p>
@@ -7520,10 +7520,10 @@
       </p:grpSpPr>
       <p:pic>
         <p:nvPicPr>
-          <p:cNvPr id="6" name="Picture 5">
-            <a:extLst>
-              <a:ext uri="{FF2B5EF4-FFF2-40B4-BE49-F238E27FC236}">
-                <a16:creationId xmlns:a16="http://schemas.microsoft.com/office/drawing/2014/main" id="{97DAF4B5-896D-9C60-0B2D-5C63D9A7F9C5}"/>
+          <p:cNvPr id="2" name="Picture 1" descr="A screenshot of a white text&#10;&#10;AI-generated content may be incorrect.">
+            <a:extLst>
+              <a:ext uri="{FF2B5EF4-FFF2-40B4-BE49-F238E27FC236}">
+                <a16:creationId xmlns:a16="http://schemas.microsoft.com/office/drawing/2014/main" id="{CD9D9138-BBA4-B398-3F51-6705781BC91D}"/>
               </a:ext>
             </a:extLst>
           </p:cNvPr>
@@ -7540,81 +7540,20 @@
         </p:blipFill>
         <p:spPr>
           <a:xfrm>
-            <a:off x="194619" y="102943"/>
-            <a:ext cx="1529678" cy="863528"/>
+            <a:off x="194619" y="966471"/>
+            <a:ext cx="7772400" cy="5913612"/>
           </a:xfrm>
           <a:prstGeom prst="rect">
             <a:avLst/>
           </a:prstGeom>
         </p:spPr>
       </p:pic>
-      <p:sp>
-        <p:nvSpPr>
-          <p:cNvPr id="7" name="TextBox 6">
-            <a:extLst>
-              <a:ext uri="{FF2B5EF4-FFF2-40B4-BE49-F238E27FC236}">
-                <a16:creationId xmlns:a16="http://schemas.microsoft.com/office/drawing/2014/main" id="{61B15729-9FEB-E567-48E9-2AA9C8EECF8D}"/>
-              </a:ext>
-            </a:extLst>
-          </p:cNvPr>
-          <p:cNvSpPr txBox="1"/>
-          <p:nvPr/>
-        </p:nvSpPr>
-        <p:spPr>
-          <a:xfrm>
-            <a:off x="1719544" y="258585"/>
-            <a:ext cx="9435596" cy="707886"/>
-          </a:xfrm>
-          <a:prstGeom prst="rect">
-            <a:avLst/>
-          </a:prstGeom>
-          <a:noFill/>
-        </p:spPr>
-        <p:txBody>
-          <a:bodyPr wrap="none" rtlCol="0">
-            <a:spAutoFit/>
-          </a:bodyPr>
-          <a:lstStyle/>
-          <a:p>
-            <a:r>
-              <a:rPr lang="en-US" sz="4000" b="1" dirty="0">
-                <a:solidFill>
-                  <a:srgbClr val="E97109"/>
-                </a:solidFill>
-                <a:latin typeface="Arial" panose="020B0604020202020204" pitchFamily="34" charset="0"/>
-                <a:cs typeface="Arial" panose="020B0604020202020204" pitchFamily="34" charset="0"/>
-              </a:rPr>
-              <a:t>E04</a:t>
-            </a:r>
-            <a:r>
-              <a:rPr lang="en-CL" sz="4000" b="1" dirty="0">
-                <a:solidFill>
-                  <a:srgbClr val="E97109"/>
-                </a:solidFill>
-                <a:latin typeface="Arial" panose="020B0604020202020204" pitchFamily="34" charset="0"/>
-                <a:cs typeface="Arial" panose="020B0604020202020204" pitchFamily="34" charset="0"/>
-              </a:rPr>
-              <a:t> &gt; P04: </a:t>
-            </a:r>
-            <a:r>
-              <a:rPr lang="en-CL" sz="4000" b="1" dirty="0">
-                <a:solidFill>
-                  <a:srgbClr val="E97F32"/>
-                </a:solidFill>
-                <a:latin typeface="Arial" panose="020B0604020202020204" pitchFamily="34" charset="0"/>
-                <a:cs typeface="Arial" panose="020B0604020202020204" pitchFamily="34" charset="0"/>
-              </a:rPr>
-              <a:t>Extracción para toda la BD</a:t>
-            </a:r>
-          </a:p>
-        </p:txBody>
-      </p:sp>
       <p:pic>
         <p:nvPicPr>
-          <p:cNvPr id="3" name="Picture 2" descr="A screenshot of a computer&#10;&#10;AI-generated content may be incorrect.">
-            <a:extLst>
-              <a:ext uri="{FF2B5EF4-FFF2-40B4-BE49-F238E27FC236}">
-                <a16:creationId xmlns:a16="http://schemas.microsoft.com/office/drawing/2014/main" id="{CA24255C-65AC-3987-B349-A441ECAF5279}"/>
+          <p:cNvPr id="6" name="Picture 5">
+            <a:extLst>
+              <a:ext uri="{FF2B5EF4-FFF2-40B4-BE49-F238E27FC236}">
+                <a16:creationId xmlns:a16="http://schemas.microsoft.com/office/drawing/2014/main" id="{97DAF4B5-896D-9C60-0B2D-5C63D9A7F9C5}"/>
               </a:ext>
             </a:extLst>
           </p:cNvPr>
@@ -7631,14 +7570,75 @@
         </p:blipFill>
         <p:spPr>
           <a:xfrm>
-            <a:off x="0" y="1138083"/>
-            <a:ext cx="7242048" cy="5607830"/>
+            <a:off x="194619" y="102943"/>
+            <a:ext cx="1529678" cy="863528"/>
           </a:xfrm>
           <a:prstGeom prst="rect">
             <a:avLst/>
           </a:prstGeom>
         </p:spPr>
       </p:pic>
+      <p:sp>
+        <p:nvSpPr>
+          <p:cNvPr id="7" name="TextBox 6">
+            <a:extLst>
+              <a:ext uri="{FF2B5EF4-FFF2-40B4-BE49-F238E27FC236}">
+                <a16:creationId xmlns:a16="http://schemas.microsoft.com/office/drawing/2014/main" id="{61B15729-9FEB-E567-48E9-2AA9C8EECF8D}"/>
+              </a:ext>
+            </a:extLst>
+          </p:cNvPr>
+          <p:cNvSpPr txBox="1"/>
+          <p:nvPr/>
+        </p:nvSpPr>
+        <p:spPr>
+          <a:xfrm>
+            <a:off x="1719544" y="258585"/>
+            <a:ext cx="9435596" cy="707886"/>
+          </a:xfrm>
+          <a:prstGeom prst="rect">
+            <a:avLst/>
+          </a:prstGeom>
+          <a:noFill/>
+        </p:spPr>
+        <p:txBody>
+          <a:bodyPr wrap="none" rtlCol="0">
+            <a:spAutoFit/>
+          </a:bodyPr>
+          <a:lstStyle/>
+          <a:p>
+            <a:r>
+              <a:rPr lang="en-US" sz="4000" b="1" dirty="0">
+                <a:solidFill>
+                  <a:srgbClr val="E97109"/>
+                </a:solidFill>
+                <a:latin typeface="Arial" panose="020B0604020202020204" pitchFamily="34" charset="0"/>
+                <a:cs typeface="Arial" panose="020B0604020202020204" pitchFamily="34" charset="0"/>
+              </a:rPr>
+              <a:t>E04</a:t>
+            </a:r>
+            <a:r>
+              <a:rPr lang="en-CL" sz="4000" b="1" dirty="0">
+                <a:solidFill>
+                  <a:srgbClr val="E97109"/>
+                </a:solidFill>
+                <a:latin typeface="Arial" panose="020B0604020202020204" pitchFamily="34" charset="0"/>
+                <a:cs typeface="Arial" panose="020B0604020202020204" pitchFamily="34" charset="0"/>
+              </a:rPr>
+              <a:t> &gt; P04: </a:t>
+            </a:r>
+            <a:r>
+              <a:rPr lang="en-CL" sz="4000" b="1" dirty="0">
+                <a:solidFill>
+                  <a:srgbClr val="E97F32"/>
+                </a:solidFill>
+                <a:latin typeface="Arial" panose="020B0604020202020204" pitchFamily="34" charset="0"/>
+                <a:cs typeface="Arial" panose="020B0604020202020204" pitchFamily="34" charset="0"/>
+              </a:rPr>
+              <a:t>Extracción para toda la BD</a:t>
+            </a:r>
+          </a:p>
+        </p:txBody>
+      </p:sp>
       <p:pic>
         <p:nvPicPr>
           <p:cNvPr id="9" name="Picture 8" descr="A black text on a white background&#10;&#10;AI-generated content may be incorrect.">
